--- a/catalog/samples/kpi_dashboard.pptx
+++ b/catalog/samples/kpi_dashboard.pptx
@@ -1472,7 +1472,7 @@
           </a:p>
           <a:p>
             <a:r>
-              <a:t>  "template_sha256": "1175648dc0faaf065e301b2839bef2c317682f0575f789cbd68dc1a8763e17a7"</a:t>
+              <a:t>  "template_sha256": "a49b917eae5d13defca3cae2ba6b9aba72fc6db483a26917238873d666337edf"</a:t>
             </a:r>
           </a:p>
           <a:p>
